--- a/Programacion II/Clases/Clase 15 - Parcial 3/Presentacion.pptx
+++ b/Programacion II/Clases/Clase 15 - Parcial 3/Presentacion.pptx
@@ -3681,7 +3681,7 @@
                 </a:solidFill>
                 <a:latin typeface="Calibri"/>
               </a:rPr>
-              <a:t>–   No hay tema nuevo ni taller del PI en esta sesion.</a:t>
+              <a:t>–   No hay tema nuevo en esta sesion.</a:t>
             </a:r>
           </a:p>
           <a:p>

--- a/Programacion II/Clases/Clase 15 - Parcial 3/Presentacion.pptx
+++ b/Programacion II/Clases/Clase 15 - Parcial 3/Presentacion.pptx
@@ -3731,7 +3731,7 @@
                 </a:solidFill>
                 <a:latin typeface="Calibri"/>
               </a:rPr>
-              <a:t>–   La preparacion del PI continua en la siguiente clase regular.</a:t>
+              <a:t>–   Entra lo visto en el corte hasta hoy; el enunciado y el canal de entrega se comparten al empezar.</a:t>
             </a:r>
           </a:p>
         </p:txBody>
@@ -3947,7 +3947,7 @@
                 </a:solidFill>
                 <a:latin typeface="Calibri"/>
               </a:rPr>
-              <a:t>El PI VetCare continua la proxima clase</a:t>
+              <a:t>El tema continua la proxima clase</a:t>
             </a:r>
           </a:p>
         </p:txBody>

--- a/Programacion II/Clases/Clase 15 - Parcial 3/Presentacion.pptx
+++ b/Programacion II/Clases/Clase 15 - Parcial 3/Presentacion.pptx
@@ -3615,14 +3615,118 @@
       </p:sp>
       <p:sp>
         <p:nvSpPr>
-          <p:cNvPr id="5" name="TextBox 4"/>
+          <p:cNvPr id="5" name="Rounded Rectangle 4"/>
+          <p:cNvSpPr/>
+          <p:nvPr/>
+        </p:nvSpPr>
+        <p:spPr>
+          <a:xfrm>
+            <a:off x="5797149" y="2175828"/>
+            <a:ext cx="6010497" cy="2853814"/>
+          </a:xfrm>
+          <a:prstGeom prst="roundRect">
+            <a:avLst>
+              <a:gd name="adj" fmla="val 4000"/>
+            </a:avLst>
+          </a:prstGeom>
+          <a:solidFill>
+            <a:srgbClr val="E8EEF4"/>
+          </a:solidFill>
+          <a:ln>
+            <a:noFill/>
+          </a:ln>
+        </p:spPr>
+        <p:style>
+          <a:lnRef idx="1">
+            <a:schemeClr val="accent1"/>
+          </a:lnRef>
+          <a:fillRef idx="3">
+            <a:schemeClr val="accent1"/>
+          </a:fillRef>
+          <a:effectRef idx="2">
+            <a:schemeClr val="accent1"/>
+          </a:effectRef>
+          <a:fontRef idx="minor">
+            <a:schemeClr val="lt1"/>
+          </a:fontRef>
+        </p:style>
+        <p:txBody>
+          <a:bodyPr rtlCol="0" anchor="ctr"/>
+          <a:lstStyle/>
+          <a:p>
+            <a:pPr algn="ctr"/>
+          </a:p>
+        </p:txBody>
+      </p:sp>
+      <p:pic>
+        <p:nvPicPr>
+          <p:cNvPr id="6" name="Picture 5" descr="students-writing-exam.jpg"/>
+          <p:cNvPicPr>
+            <a:picLocks noChangeAspect="1"/>
+          </p:cNvPicPr>
+          <p:nvPr/>
+        </p:nvPicPr>
+        <p:blipFill>
+          <a:blip r:embed="rId2"/>
+          <a:stretch>
+            <a:fillRect/>
+          </a:stretch>
+        </p:blipFill>
+        <p:spPr>
+          <a:xfrm>
+            <a:off x="5870301" y="2248980"/>
+            <a:ext cx="5864193" cy="2707510"/>
+          </a:xfrm>
+          <a:prstGeom prst="rect">
+            <a:avLst/>
+          </a:prstGeom>
+        </p:spPr>
+      </p:pic>
+      <p:sp>
+        <p:nvSpPr>
+          <p:cNvPr id="7" name="TextBox 6"/>
           <p:cNvSpPr txBox="1"/>
           <p:nvPr/>
         </p:nvSpPr>
         <p:spPr>
           <a:xfrm>
-            <a:off x="457200" y="1170432"/>
-            <a:ext cx="11277295" cy="5230368"/>
+            <a:off x="5870301" y="5961888"/>
+            <a:ext cx="5864193" cy="320040"/>
+          </a:xfrm>
+          <a:prstGeom prst="rect">
+            <a:avLst/>
+          </a:prstGeom>
+          <a:noFill/>
+        </p:spPr>
+        <p:txBody>
+          <a:bodyPr wrap="square">
+            <a:spAutoFit/>
+          </a:bodyPr>
+          <a:lstStyle/>
+          <a:p>
+            <a:pPr algn="ctr"/>
+            <a:r>
+              <a:rPr sz="1100" b="0" i="1">
+                <a:solidFill>
+                  <a:srgbClr val="666666"/>
+                </a:solidFill>
+                <a:latin typeface="Calibri"/>
+              </a:rPr>
+              <a:t>Foto: This And No Internet 25 · Pexels</a:t>
+            </a:r>
+          </a:p>
+        </p:txBody>
+      </p:sp>
+      <p:sp>
+        <p:nvSpPr>
+          <p:cNvPr id="8" name="TextBox 7"/>
+          <p:cNvSpPr txBox="1"/>
+          <p:nvPr/>
+        </p:nvSpPr>
+        <p:spPr>
+          <a:xfrm>
+            <a:off x="457200" y="1353312"/>
+            <a:ext cx="5093061" cy="5047488"/>
           </a:xfrm>
           <a:prstGeom prst="rect">
             <a:avLst/>
@@ -3738,7 +3842,7 @@
       </p:sp>
       <p:sp>
         <p:nvSpPr>
-          <p:cNvPr id="6" name="TextBox 5"/>
+          <p:cNvPr id="9" name="TextBox 8"/>
           <p:cNvSpPr txBox="1"/>
           <p:nvPr/>
         </p:nvSpPr>

--- a/Programacion II/Clases/Clase 15 - Parcial 3/Presentacion.pptx
+++ b/Programacion II/Clases/Clase 15 - Parcial 3/Presentacion.pptx
@@ -3615,118 +3615,14 @@
       </p:sp>
       <p:sp>
         <p:nvSpPr>
-          <p:cNvPr id="5" name="Rounded Rectangle 4"/>
-          <p:cNvSpPr/>
+          <p:cNvPr id="5" name="TextBox 4"/>
+          <p:cNvSpPr txBox="1"/>
           <p:nvPr/>
         </p:nvSpPr>
         <p:spPr>
           <a:xfrm>
-            <a:off x="5797149" y="2175828"/>
-            <a:ext cx="6010497" cy="2853814"/>
-          </a:xfrm>
-          <a:prstGeom prst="roundRect">
-            <a:avLst>
-              <a:gd name="adj" fmla="val 4000"/>
-            </a:avLst>
-          </a:prstGeom>
-          <a:solidFill>
-            <a:srgbClr val="E8EEF4"/>
-          </a:solidFill>
-          <a:ln>
-            <a:noFill/>
-          </a:ln>
-        </p:spPr>
-        <p:style>
-          <a:lnRef idx="1">
-            <a:schemeClr val="accent1"/>
-          </a:lnRef>
-          <a:fillRef idx="3">
-            <a:schemeClr val="accent1"/>
-          </a:fillRef>
-          <a:effectRef idx="2">
-            <a:schemeClr val="accent1"/>
-          </a:effectRef>
-          <a:fontRef idx="minor">
-            <a:schemeClr val="lt1"/>
-          </a:fontRef>
-        </p:style>
-        <p:txBody>
-          <a:bodyPr rtlCol="0" anchor="ctr"/>
-          <a:lstStyle/>
-          <a:p>
-            <a:pPr algn="ctr"/>
-          </a:p>
-        </p:txBody>
-      </p:sp>
-      <p:pic>
-        <p:nvPicPr>
-          <p:cNvPr id="6" name="Picture 5" descr="students-writing-exam.jpg"/>
-          <p:cNvPicPr>
-            <a:picLocks noChangeAspect="1"/>
-          </p:cNvPicPr>
-          <p:nvPr/>
-        </p:nvPicPr>
-        <p:blipFill>
-          <a:blip r:embed="rId2"/>
-          <a:stretch>
-            <a:fillRect/>
-          </a:stretch>
-        </p:blipFill>
-        <p:spPr>
-          <a:xfrm>
-            <a:off x="5870301" y="2248980"/>
-            <a:ext cx="5864193" cy="2707510"/>
-          </a:xfrm>
-          <a:prstGeom prst="rect">
-            <a:avLst/>
-          </a:prstGeom>
-        </p:spPr>
-      </p:pic>
-      <p:sp>
-        <p:nvSpPr>
-          <p:cNvPr id="7" name="TextBox 6"/>
-          <p:cNvSpPr txBox="1"/>
-          <p:nvPr/>
-        </p:nvSpPr>
-        <p:spPr>
-          <a:xfrm>
-            <a:off x="5870301" y="5961888"/>
-            <a:ext cx="5864193" cy="320040"/>
-          </a:xfrm>
-          <a:prstGeom prst="rect">
-            <a:avLst/>
-          </a:prstGeom>
-          <a:noFill/>
-        </p:spPr>
-        <p:txBody>
-          <a:bodyPr wrap="square">
-            <a:spAutoFit/>
-          </a:bodyPr>
-          <a:lstStyle/>
-          <a:p>
-            <a:pPr algn="ctr"/>
-            <a:r>
-              <a:rPr sz="1100" b="0" i="1">
-                <a:solidFill>
-                  <a:srgbClr val="666666"/>
-                </a:solidFill>
-                <a:latin typeface="Calibri"/>
-              </a:rPr>
-              <a:t>Foto: This And No Internet 25 · Pexels</a:t>
-            </a:r>
-          </a:p>
-        </p:txBody>
-      </p:sp>
-      <p:sp>
-        <p:nvSpPr>
-          <p:cNvPr id="8" name="TextBox 7"/>
-          <p:cNvSpPr txBox="1"/>
-          <p:nvPr/>
-        </p:nvSpPr>
-        <p:spPr>
-          <a:xfrm>
-            <a:off x="457200" y="1353312"/>
-            <a:ext cx="5093061" cy="5047488"/>
+            <a:off x="457200" y="1170432"/>
+            <a:ext cx="11277295" cy="5230368"/>
           </a:xfrm>
           <a:prstGeom prst="rect">
             <a:avLst/>
@@ -3842,7 +3738,7 @@
       </p:sp>
       <p:sp>
         <p:nvSpPr>
-          <p:cNvPr id="9" name="TextBox 8"/>
+          <p:cNvPr id="6" name="TextBox 5"/>
           <p:cNvSpPr txBox="1"/>
           <p:nvPr/>
         </p:nvSpPr>
